--- a/语音识别助手_项目汇报.pptx
+++ b/语音识别助手_项目汇报.pptx
@@ -1862,7 +1862,7 @@
                 <a:ea typeface="Microsoft YaHei" pitchFamily="34" charset="-122"/>
                 <a:cs typeface="Microsoft YaHei" pitchFamily="34" charset="-120"/>
               </a:rPr>
-              <a:t>用户通过自然语言语音指令控制电脑，集成声纹身份验证</a:t>
+              <a:t>我们做了什么？怎么做的？</a:t>
             </a:r>
             <a:endParaRPr lang="en-US" sz="1300" dirty="0"/>
           </a:p>
@@ -1984,7 +1984,7 @@
           <a:p>
             <a:pPr indent="0" marL="0">
               <a:lnSpc>
-                <a:spcPct val="140000"/>
+                <a:spcPct val="135000"/>
               </a:lnSpc>
               <a:buNone/>
             </a:pPr>
@@ -1997,14 +1997,14 @@
                 <a:ea typeface="Microsoft YaHei" pitchFamily="34" charset="-122"/>
                 <a:cs typeface="Microsoft YaHei" pitchFamily="34" charset="-120"/>
               </a:rPr>
-              <a:t>构建本地化智能语音控制助手：</a:t>
+              <a:t>简单来说，我们想做的事情是：</a:t>
             </a:r>
             <a:endParaRPr lang="en-US" sz="1200" dirty="0"/>
           </a:p>
           <a:p>
             <a:pPr indent="0" marL="0">
               <a:lnSpc>
-                <a:spcPct val="140000"/>
+                <a:spcPct val="135000"/>
               </a:lnSpc>
               <a:buNone/>
             </a:pPr>
@@ -2013,11 +2013,109 @@
           <a:p>
             <a:pPr indent="0" marL="0">
               <a:lnSpc>
-                <a:spcPct val="140000"/>
+                <a:spcPct val="135000"/>
               </a:lnSpc>
               <a:buNone/>
             </a:pPr>
             <a:r>
+              <a:rPr lang="en-US" sz="1200" dirty="0">
+                <a:solidFill>
+                  <a:srgbClr val="1A1A2E"/>
+                </a:solidFill>
+                <a:latin typeface="Microsoft YaHei" pitchFamily="34" charset="0"/>
+                <a:ea typeface="Microsoft YaHei" pitchFamily="34" charset="-122"/>
+                <a:cs typeface="Microsoft YaHei" pitchFamily="34" charset="-120"/>
+              </a:rPr>
+              <a:t>让用户对着麦克风说一句话，电脑就能听懂并执行。</a:t>
+            </a:r>
+            <a:endParaRPr lang="en-US" sz="1200" dirty="0"/>
+          </a:p>
+          <a:p>
+            <a:pPr indent="0" marL="0">
+              <a:lnSpc>
+                <a:spcPct val="135000"/>
+              </a:lnSpc>
+              <a:buNone/>
+            </a:pPr>
+            <a:endParaRPr lang="en-US" sz="1200" dirty="0"/>
+          </a:p>
+          <a:p>
+            <a:pPr indent="0" marL="0">
+              <a:lnSpc>
+                <a:spcPct val="135000"/>
+              </a:lnSpc>
+              <a:buNone/>
+            </a:pPr>
+            <a:r>
+              <a:rPr lang="en-US" sz="1200" dirty="0">
+                <a:solidFill>
+                  <a:srgbClr val="1A1A2E"/>
+                </a:solidFill>
+                <a:latin typeface="Microsoft YaHei" pitchFamily="34" charset="0"/>
+                <a:ea typeface="Microsoft YaHei" pitchFamily="34" charset="-122"/>
+                <a:cs typeface="Microsoft YaHei" pitchFamily="34" charset="-120"/>
+              </a:rPr>
+              <a:t>比如说“打开微信”，系统就会自动帮你打开；</a:t>
+            </a:r>
+            <a:endParaRPr lang="en-US" sz="1200" dirty="0"/>
+          </a:p>
+          <a:p>
+            <a:pPr indent="0" marL="0">
+              <a:lnSpc>
+                <a:spcPct val="135000"/>
+              </a:lnSpc>
+              <a:buNone/>
+            </a:pPr>
+            <a:r>
+              <a:rPr lang="en-US" sz="1200" dirty="0">
+                <a:solidFill>
+                  <a:srgbClr val="1A1A2E"/>
+                </a:solidFill>
+                <a:latin typeface="Microsoft YaHei" pitchFamily="34" charset="0"/>
+                <a:ea typeface="Microsoft YaHei" pitchFamily="34" charset="-122"/>
+                <a:cs typeface="Microsoft YaHei" pitchFamily="34" charset="-120"/>
+              </a:rPr>
+              <a:t>说“音量调大”，就会自动调节音量；</a:t>
+            </a:r>
+            <a:endParaRPr lang="en-US" sz="1200" dirty="0"/>
+          </a:p>
+          <a:p>
+            <a:pPr indent="0" marL="0">
+              <a:lnSpc>
+                <a:spcPct val="135000"/>
+              </a:lnSpc>
+              <a:buNone/>
+            </a:pPr>
+            <a:r>
+              <a:rPr lang="en-US" sz="1200" dirty="0">
+                <a:solidFill>
+                  <a:srgbClr val="1A1A2E"/>
+                </a:solidFill>
+                <a:latin typeface="Microsoft YaHei" pitchFamily="34" charset="0"/>
+                <a:ea typeface="Microsoft YaHei" pitchFamily="34" charset="-122"/>
+                <a:cs typeface="Microsoft YaHei" pitchFamily="34" charset="-120"/>
+              </a:rPr>
+              <a:t>甚至可以一句话里包含多条指令，比如：</a:t>
+            </a:r>
+            <a:endParaRPr lang="en-US" sz="1200" dirty="0"/>
+          </a:p>
+          <a:p>
+            <a:pPr indent="0" marL="0">
+              <a:lnSpc>
+                <a:spcPct val="135000"/>
+              </a:lnSpc>
+              <a:buNone/>
+            </a:pPr>
+            <a:endParaRPr lang="en-US" sz="1200" dirty="0"/>
+          </a:p>
+          <a:p>
+            <a:pPr indent="0" marL="0">
+              <a:lnSpc>
+                <a:spcPct val="135000"/>
+              </a:lnSpc>
+              <a:buNone/>
+            </a:pPr>
+            <a:r>
               <a:rPr lang="en-US" sz="1200" b="1" dirty="0">
                 <a:solidFill>
                   <a:srgbClr val="1A73E8"/>
@@ -2026,26 +2124,17 @@
                 <a:ea typeface="Microsoft YaHei" pitchFamily="34" charset="-122"/>
                 <a:cs typeface="Microsoft YaHei" pitchFamily="34" charset="-120"/>
               </a:rPr>
-              <a:t>语音输入 → ASR 识别 → 指令解析 → 系统执行</a:t>
+              <a:t>“打开微信，打开记事本，截图”</a:t>
             </a:r>
             <a:endParaRPr lang="en-US" sz="1200" dirty="0"/>
           </a:p>
           <a:p>
             <a:pPr indent="0" marL="0">
               <a:lnSpc>
-                <a:spcPct val="140000"/>
+                <a:spcPct val="135000"/>
               </a:lnSpc>
               <a:buNone/>
             </a:pPr>
-            <a:endParaRPr lang="en-US" sz="1200" dirty="0"/>
-          </a:p>
-          <a:p>
-            <a:pPr indent="0" marL="0">
-              <a:lnSpc>
-                <a:spcPct val="140000"/>
-              </a:lnSpc>
-              <a:buNone/>
-            </a:pPr>
             <a:r>
               <a:rPr lang="en-US" sz="1200" dirty="0">
                 <a:solidFill>
@@ -2055,67 +2144,7 @@
                 <a:ea typeface="Microsoft YaHei" pitchFamily="34" charset="-122"/>
                 <a:cs typeface="Microsoft YaHei" pitchFamily="34" charset="-120"/>
               </a:rPr>
-              <a:t>支持应用启停、音量调节、截图、搜索等系统操作</a:t>
-            </a:r>
-            <a:endParaRPr lang="en-US" sz="1200" dirty="0"/>
-          </a:p>
-          <a:p>
-            <a:pPr indent="0" marL="0">
-              <a:lnSpc>
-                <a:spcPct val="140000"/>
-              </a:lnSpc>
-              <a:buNone/>
-            </a:pPr>
-            <a:r>
-              <a:rPr lang="en-US" sz="1200" dirty="0">
-                <a:solidFill>
-                  <a:srgbClr val="1A1A2E"/>
-                </a:solidFill>
-                <a:latin typeface="Microsoft YaHei" pitchFamily="34" charset="0"/>
-                <a:ea typeface="Microsoft YaHei" pitchFamily="34" charset="-122"/>
-                <a:cs typeface="Microsoft YaHei" pitchFamily="34" charset="-120"/>
-              </a:rPr>
-              <a:t>集成声纹识别实现用户身份验证</a:t>
-            </a:r>
-            <a:endParaRPr lang="en-US" sz="1200" dirty="0"/>
-          </a:p>
-          <a:p>
-            <a:pPr indent="0" marL="0">
-              <a:lnSpc>
-                <a:spcPct val="140000"/>
-              </a:lnSpc>
-              <a:buNone/>
-            </a:pPr>
-            <a:r>
-              <a:rPr lang="en-US" sz="1200" dirty="0">
-                <a:solidFill>
-                  <a:srgbClr val="1A1A2E"/>
-                </a:solidFill>
-                <a:latin typeface="Microsoft YaHei" pitchFamily="34" charset="0"/>
-                <a:ea typeface="Microsoft YaHei" pitchFamily="34" charset="-122"/>
-                <a:cs typeface="Microsoft YaHei" pitchFamily="34" charset="-120"/>
-              </a:rPr>
-              <a:t>多指令拆分：一条语音包含多条指令逐条执行</a:t>
-            </a:r>
-            <a:endParaRPr lang="en-US" sz="1200" dirty="0"/>
-          </a:p>
-          <a:p>
-            <a:pPr indent="0" marL="0">
-              <a:lnSpc>
-                <a:spcPct val="140000"/>
-              </a:lnSpc>
-              <a:buNone/>
-            </a:pPr>
-            <a:r>
-              <a:rPr lang="en-US" sz="1200" dirty="0">
-                <a:solidFill>
-                  <a:srgbClr val="1A1A2E"/>
-                </a:solidFill>
-                <a:latin typeface="Microsoft YaHei" pitchFamily="34" charset="0"/>
-                <a:ea typeface="Microsoft YaHei" pitchFamily="34" charset="-122"/>
-                <a:cs typeface="Microsoft YaHei" pitchFamily="34" charset="-120"/>
-              </a:rPr>
-              <a:t>PyQt5 赛博朋克风格无边框界面</a:t>
+              <a:t>系统会把它拆分成三条指令逐一执行。</a:t>
             </a:r>
             <a:endParaRPr lang="en-US" sz="1200" dirty="0"/>
           </a:p>
@@ -2188,7 +2217,7 @@
                 <a:ea typeface="Microsoft YaHei" pitchFamily="34" charset="-122"/>
                 <a:cs typeface="Microsoft YaHei" pitchFamily="34" charset="-120"/>
               </a:rPr>
-              <a:t>核心技术栈</a:t>
+              <a:t>技术栈一览</a:t>
             </a:r>
             <a:endParaRPr lang="en-US" sz="1600" dirty="0"/>
           </a:p>
@@ -2249,7 +2278,7 @@
                 <a:ea typeface="Microsoft YaHei" pitchFamily="34" charset="-122"/>
                 <a:cs typeface="Microsoft YaHei" pitchFamily="34" charset="-120"/>
               </a:rPr>
-              <a:t>ASR 引擎</a:t>
+              <a:t>语音识别</a:t>
             </a:r>
             <a:endParaRPr lang="en-US" sz="1100" dirty="0"/>
           </a:p>
@@ -2288,7 +2317,7 @@
                 <a:ea typeface="Microsoft YaHei" pitchFamily="34" charset="-122"/>
                 <a:cs typeface="Microsoft YaHei" pitchFamily="34" charset="-120"/>
               </a:rPr>
-              <a:t>Faster-Whisper (CTranslate2)</a:t>
+              <a:t>Faster-Whisper，支持 GPU 加速</a:t>
             </a:r>
             <a:endParaRPr lang="en-US" sz="1100" dirty="0"/>
           </a:p>
@@ -2388,7 +2417,7 @@
                 <a:ea typeface="Microsoft YaHei" pitchFamily="34" charset="-122"/>
                 <a:cs typeface="Microsoft YaHei" pitchFamily="34" charset="-120"/>
               </a:rPr>
-              <a:t>ECAPA-TDNN (SpeechBrain)</a:t>
+              <a:t>ECAPA-TDNN，深度学习声纹模型</a:t>
             </a:r>
             <a:endParaRPr lang="en-US" sz="1100" dirty="0"/>
           </a:p>
@@ -2488,7 +2517,7 @@
                 <a:ea typeface="Microsoft YaHei" pitchFamily="34" charset="-122"/>
                 <a:cs typeface="Microsoft YaHei" pitchFamily="34" charset="-120"/>
               </a:rPr>
-              <a:t>Silero VAD + NumPy</a:t>
+              <a:t>Silero VAD 神经网络语音检测</a:t>
             </a:r>
             <a:endParaRPr lang="en-US" sz="1100" dirty="0"/>
           </a:p>
@@ -2588,7 +2617,7 @@
                 <a:ea typeface="Microsoft YaHei" pitchFamily="34" charset="-122"/>
                 <a:cs typeface="Microsoft YaHei" pitchFamily="34" charset="-120"/>
               </a:rPr>
-              <a:t>Trie + 拼音纠错 + NLU</a:t>
+              <a:t>拼音纠错 + 多层降级策略</a:t>
             </a:r>
             <a:endParaRPr lang="en-US" sz="1100" dirty="0"/>
           </a:p>
@@ -2688,7 +2717,7 @@
                 <a:ea typeface="Microsoft YaHei" pitchFamily="34" charset="-122"/>
                 <a:cs typeface="Microsoft YaHei" pitchFamily="34" charset="-120"/>
               </a:rPr>
-              <a:t>PyQt5 + QSS 毛玻璃</a:t>
+              <a:t>PyQt5，赛博朋克风格</a:t>
             </a:r>
             <a:endParaRPr lang="en-US" sz="1100" dirty="0"/>
           </a:p>
@@ -2788,7 +2817,7 @@
                 <a:ea typeface="Microsoft YaHei" pitchFamily="34" charset="-122"/>
                 <a:cs typeface="Microsoft YaHei" pitchFamily="34" charset="-120"/>
               </a:rPr>
-              <a:t>pyttsx3 TTS</a:t>
+              <a:t>pyttsx3，支持 TTS 播报</a:t>
             </a:r>
             <a:endParaRPr lang="en-US" sz="1100" dirty="0"/>
           </a:p>
@@ -2918,7 +2947,7 @@
                 <a:ea typeface="Microsoft YaHei" pitchFamily="34" charset="-122"/>
                 <a:cs typeface="Microsoft YaHei" pitchFamily="34" charset="-120"/>
               </a:rPr>
-              <a:t>端到端语音控制流水线</a:t>
+              <a:t>从你说话到电脑执行，中间经历了什么？</a:t>
             </a:r>
             <a:endParaRPr lang="en-US" sz="1300" dirty="0"/>
           </a:p>
@@ -3070,7 +3099,7 @@
                 <a:ea typeface="Microsoft YaHei" pitchFamily="34" charset="-122"/>
                 <a:cs typeface="Microsoft YaHei" pitchFamily="34" charset="-120"/>
               </a:rPr>
-              <a:t>PyAudio</a:t>
+              <a:t>录下你的声音</a:t>
             </a:r>
             <a:endParaRPr lang="en-US" sz="1050" dirty="0"/>
           </a:p>
@@ -3087,7 +3116,7 @@
                 <a:ea typeface="Microsoft YaHei" pitchFamily="34" charset="-122"/>
                 <a:cs typeface="Microsoft YaHei" pitchFamily="34" charset="-120"/>
               </a:rPr>
-              <a:t>16kHz PCM</a:t>
+              <a:t>16kHz 采样率</a:t>
             </a:r>
             <a:endParaRPr lang="en-US" sz="1050" dirty="0"/>
           </a:p>
@@ -3255,7 +3284,7 @@
                 <a:ea typeface="Microsoft YaHei" pitchFamily="34" charset="-122"/>
                 <a:cs typeface="Microsoft YaHei" pitchFamily="34" charset="-120"/>
               </a:rPr>
-              <a:t>Silero VAD</a:t>
+              <a:t>去噪、提取有用的</a:t>
             </a:r>
             <a:endParaRPr lang="en-US" sz="1050" dirty="0"/>
           </a:p>
@@ -3272,24 +3301,7 @@
                 <a:ea typeface="Microsoft YaHei" pitchFamily="34" charset="-122"/>
                 <a:cs typeface="Microsoft YaHei" pitchFamily="34" charset="-120"/>
               </a:rPr>
-              <a:t>峰值归一化</a:t>
-            </a:r>
-            <a:endParaRPr lang="en-US" sz="1050" dirty="0"/>
-          </a:p>
-          <a:p>
-            <a:pPr algn="ctr" indent="0" marL="0">
-              <a:buNone/>
-            </a:pPr>
-            <a:r>
-              <a:rPr lang="en-US" sz="1050" dirty="0">
-                <a:solidFill>
-                  <a:srgbClr val="4A4A6A"/>
-                </a:solidFill>
-                <a:latin typeface="Microsoft YaHei" pitchFamily="34" charset="0"/>
-                <a:ea typeface="Microsoft YaHei" pitchFamily="34" charset="-122"/>
-                <a:cs typeface="Microsoft YaHei" pitchFamily="34" charset="-120"/>
-              </a:rPr>
-              <a:t>噪声门控</a:t>
+              <a:t>语音片段</a:t>
             </a:r>
             <a:endParaRPr lang="en-US" sz="1050" dirty="0"/>
           </a:p>
@@ -3457,7 +3469,7 @@
                 <a:ea typeface="Microsoft YaHei" pitchFamily="34" charset="-122"/>
                 <a:cs typeface="Microsoft YaHei" pitchFamily="34" charset="-120"/>
               </a:rPr>
-              <a:t>Faster-Whisper</a:t>
+              <a:t>Whisper 模型</a:t>
             </a:r>
             <a:endParaRPr lang="en-US" sz="1050" dirty="0"/>
           </a:p>
@@ -3474,7 +3486,7 @@
                 <a:ea typeface="Microsoft YaHei" pitchFamily="34" charset="-122"/>
                 <a:cs typeface="Microsoft YaHei" pitchFamily="34" charset="-120"/>
               </a:rPr>
-              <a:t>beam=3 热词</a:t>
+              <a:t>听懂你说的话</a:t>
             </a:r>
             <a:endParaRPr lang="en-US" sz="1050" dirty="0"/>
           </a:p>
@@ -3642,7 +3654,7 @@
                 <a:ea typeface="Microsoft YaHei" pitchFamily="34" charset="-122"/>
                 <a:cs typeface="Microsoft YaHei" pitchFamily="34" charset="-120"/>
               </a:rPr>
-              <a:t>6层降级策略</a:t>
+              <a:t>理解你的意图</a:t>
             </a:r>
             <a:endParaRPr lang="en-US" sz="1050" dirty="0"/>
           </a:p>
@@ -3659,7 +3671,7 @@
                 <a:ea typeface="Microsoft YaHei" pitchFamily="34" charset="-122"/>
                 <a:cs typeface="Microsoft YaHei" pitchFamily="34" charset="-120"/>
               </a:rPr>
-              <a:t>Trie+拼音+NLU</a:t>
+              <a:t>找到对应操作</a:t>
             </a:r>
             <a:endParaRPr lang="en-US" sz="1050" dirty="0"/>
           </a:p>
@@ -3827,7 +3839,7 @@
                 <a:ea typeface="Microsoft YaHei" pitchFamily="34" charset="-122"/>
                 <a:cs typeface="Microsoft YaHei" pitchFamily="34" charset="-120"/>
               </a:rPr>
-              <a:t>250+ 白名单</a:t>
+              <a:t>真正去操作</a:t>
             </a:r>
             <a:endParaRPr lang="en-US" sz="1050" dirty="0"/>
           </a:p>
@@ -3844,7 +3856,7 @@
                 <a:ea typeface="Microsoft YaHei" pitchFamily="34" charset="-122"/>
                 <a:cs typeface="Microsoft YaHei" pitchFamily="34" charset="-120"/>
               </a:rPr>
-              <a:t>应用/音量/截图</a:t>
+              <a:t>你的电脑</a:t>
             </a:r>
             <a:endParaRPr lang="en-US" sz="1050" dirty="0"/>
           </a:p>
@@ -3968,7 +3980,7 @@
               <a:buNone/>
             </a:pPr>
             <a:r>
-              <a:rPr lang="en-US" sz="1100" dirty="0">
+              <a:rPr lang="en-US" sz="1150" dirty="0">
                 <a:solidFill>
                   <a:srgbClr val="4A4A6A"/>
                 </a:solidFill>
@@ -3976,9 +3988,9 @@
                 <a:ea typeface="Microsoft YaHei" pitchFamily="34" charset="-122"/>
                 <a:cs typeface="Microsoft YaHei" pitchFamily="34" charset="-120"/>
               </a:rPr>
-              <a:t>ECAPA-TDNN 提取 192 维嵌入 → 注册时 3 段录音取平均存储 → 验证时余弦相似度 ≥ 0.5 通过 → 指令执行前身份确认</a:t>
-            </a:r>
-            <a:endParaRPr lang="en-US" sz="1100" dirty="0"/>
+              <a:t>如果用户开启了声纹验证，系统会先确认“你是谁”，然后才执行指令。可以理解为给语音控制加了一把锁。</a:t>
+            </a:r>
+            <a:endParaRPr lang="en-US" sz="1150" dirty="0"/>
           </a:p>
         </p:txBody>
       </p:sp>
@@ -4108,7 +4120,7 @@
                 <a:ea typeface="Microsoft YaHei" pitchFamily="34" charset="-122"/>
                 <a:cs typeface="Microsoft YaHei" pitchFamily="34" charset="-120"/>
               </a:rPr>
-              <a:t>“打开微信,打开记事本,截图” → 按逗号/分号/句号拆分 → 逐条 parse + execute → 结果用 | 拼接返回</a:t>
+              <a:t>一句话里包含多条指令也没问题，系统会自动拆分成多条逐一执行，每条结果单独返回。</a:t>
             </a:r>
             <a:endParaRPr lang="en-US" sz="1050" dirty="0"/>
           </a:p>
@@ -4238,7 +4250,7 @@
                 <a:ea typeface="Microsoft YaHei" pitchFamily="34" charset="-122"/>
                 <a:cs typeface="Microsoft YaHei" pitchFamily="34" charset="-120"/>
               </a:rPr>
-              <a:t>Faster-Whisper 双引擎架构 + 热词引导 + 幻觉过滤</a:t>
+              <a:t>我们是怎么让电脑“听懂”人说话的</a:t>
             </a:r>
             <a:endParaRPr lang="en-US" sz="1300" dirty="0"/>
           </a:p>
@@ -4392,7 +4404,7 @@
                 <a:ea typeface="Microsoft YaHei" pitchFamily="34" charset="-122"/>
                 <a:cs typeface="Microsoft YaHei" pitchFamily="34" charset="-120"/>
               </a:rPr>
-              <a:t>① 检测 CUDA</a:t>
+              <a:t>① 检测 GPU</a:t>
             </a:r>
             <a:endParaRPr lang="en-US" sz="1100" dirty="0"/>
           </a:p>
@@ -4431,7 +4443,7 @@
                 <a:ea typeface="Microsoft YaHei" pitchFamily="34" charset="-122"/>
                 <a:cs typeface="Microsoft YaHei" pitchFamily="34" charset="-120"/>
               </a:rPr>
-              <a:t>尝试 GPU 加速，失败则回退 CPU</a:t>
+              <a:t>有 NVIDIA 显卡就用 GPU 加速，没有就用 CPU</a:t>
             </a:r>
             <a:endParaRPr lang="en-US" sz="1050" dirty="0"/>
           </a:p>
@@ -4492,7 +4504,7 @@
                 <a:ea typeface="Microsoft YaHei" pitchFamily="34" charset="-122"/>
                 <a:cs typeface="Microsoft YaHei" pitchFamily="34" charset="-120"/>
               </a:rPr>
-              <a:t>② 尝试 Faster-Whisper</a:t>
+              <a:t>② 加载 Whisper</a:t>
             </a:r>
             <a:endParaRPr lang="en-US" sz="1100" dirty="0"/>
           </a:p>
@@ -4531,7 +4543,7 @@
                 <a:ea typeface="Microsoft YaHei" pitchFamily="34" charset="-122"/>
                 <a:cs typeface="Microsoft YaHei" pitchFamily="34" charset="-120"/>
               </a:rPr>
-              <a:t>CTranslate2 int8 量化，加载 HF 缓存或本地模型</a:t>
+              <a:t>优先用 CTranslate2 量化版本，速度更快</a:t>
             </a:r>
             <a:endParaRPr lang="en-US" sz="1050" dirty="0"/>
           </a:p>
@@ -4592,7 +4604,7 @@
                 <a:ea typeface="Microsoft YaHei" pitchFamily="34" charset="-122"/>
                 <a:cs typeface="Microsoft YaHei" pitchFamily="34" charset="-120"/>
               </a:rPr>
-              <a:t>③ 回退 OpenAI Whisper</a:t>
+              <a:t>③ 备用方案</a:t>
             </a:r>
             <a:endParaRPr lang="en-US" sz="1100" dirty="0"/>
           </a:p>
@@ -4631,7 +4643,7 @@
                 <a:ea typeface="Microsoft YaHei" pitchFamily="34" charset="-122"/>
                 <a:cs typeface="Microsoft YaHei" pitchFamily="34" charset="-120"/>
               </a:rPr>
-              <a:t>PyTorch 原生实现，作为兜底引擎</a:t>
+              <a:t>如果加载失败，自动切换到原版 Whisper</a:t>
             </a:r>
             <a:endParaRPr lang="en-US" sz="1050" dirty="0"/>
           </a:p>
@@ -4692,7 +4704,7 @@
                 <a:ea typeface="Microsoft YaHei" pitchFamily="34" charset="-122"/>
                 <a:cs typeface="Microsoft YaHei" pitchFamily="34" charset="-120"/>
               </a:rPr>
-              <a:t>④ 注入热词 initial_prompt</a:t>
+              <a:t>④ 注入热词</a:t>
             </a:r>
             <a:endParaRPr lang="en-US" sz="1100" dirty="0"/>
           </a:p>
@@ -4731,7 +4743,7 @@
                 <a:ea typeface="Microsoft YaHei" pitchFamily="34" charset="-122"/>
                 <a:cs typeface="Microsoft YaHei" pitchFamily="34" charset="-120"/>
               </a:rPr>
-              <a:t>扫描 250+ 桌面快捷方式名注入引导词</a:t>
+              <a:t>扫描桌面快捷方式，把应用名告诉模型</a:t>
             </a:r>
             <a:endParaRPr lang="en-US" sz="1050" dirty="0"/>
           </a:p>
@@ -4792,7 +4804,7 @@
                 <a:ea typeface="Microsoft YaHei" pitchFamily="34" charset="-122"/>
                 <a:cs typeface="Microsoft YaHei" pitchFamily="34" charset="-120"/>
               </a:rPr>
-              <a:t>⑤ 设置解码参数</a:t>
+              <a:t>⑤ 设置参数</a:t>
             </a:r>
             <a:endParaRPr lang="en-US" sz="1100" dirty="0"/>
           </a:p>
@@ -4831,7 +4843,7 @@
                 <a:ea typeface="Microsoft YaHei" pitchFamily="34" charset="-122"/>
                 <a:cs typeface="Microsoft YaHei" pitchFamily="34" charset="-120"/>
               </a:rPr>
-              <a:t>beam=3, temp=0.0, rep_penalty=1.1</a:t>
+              <a:t>束搜索宽度=3，平衡准确率和速度</a:t>
             </a:r>
             <a:endParaRPr lang="en-US" sz="1050" dirty="0"/>
           </a:p>
@@ -4965,7 +4977,7 @@
                 <a:ea typeface="Microsoft YaHei" pitchFamily="34" charset="-122"/>
                 <a:cs typeface="Microsoft YaHei" pitchFamily="34" charset="-120"/>
               </a:rPr>
-              <a:t>① 输入预处理</a:t>
+              <a:t>① 检查音频</a:t>
             </a:r>
             <a:endParaRPr lang="en-US" sz="1100" dirty="0"/>
           </a:p>
@@ -5004,7 +5016,7 @@
                 <a:ea typeface="Microsoft YaHei" pitchFamily="34" charset="-122"/>
                 <a:cs typeface="Microsoft YaHei" pitchFamily="34" charset="-120"/>
               </a:rPr>
-              <a:t>float32 归一化 + 能量检查</a:t>
+              <a:t>音频太短或太小声直接跳过</a:t>
             </a:r>
             <a:endParaRPr lang="en-US" sz="1050" dirty="0"/>
           </a:p>
@@ -5104,7 +5116,7 @@
                 <a:ea typeface="Microsoft YaHei" pitchFamily="34" charset="-122"/>
                 <a:cs typeface="Microsoft YaHei" pitchFamily="34" charset="-120"/>
               </a:rPr>
-              <a:t>内置 Silero VAD 跳过静音段</a:t>
+              <a:t>用神经网络找出“人在说话”的部分</a:t>
             </a:r>
             <a:endParaRPr lang="en-US" sz="1050" dirty="0"/>
           </a:p>
@@ -5204,7 +5216,7 @@
                 <a:ea typeface="Microsoft YaHei" pitchFamily="34" charset="-122"/>
                 <a:cs typeface="Microsoft YaHei" pitchFamily="34" charset="-120"/>
               </a:rPr>
-              <a:t>beam_size=3, 3候选取最优</a:t>
+              <a:t>同时考虑 3 个候选答案，选最好的</a:t>
             </a:r>
             <a:endParaRPr lang="en-US" sz="1050" dirty="0"/>
           </a:p>
@@ -5304,7 +5316,7 @@
                 <a:ea typeface="Microsoft YaHei" pitchFamily="34" charset="-122"/>
                 <a:cs typeface="Microsoft YaHei" pitchFamily="34" charset="-120"/>
               </a:rPr>
-              <a:t>内置映射表 繁体→简体</a:t>
+              <a:t>自动把繁体字转成简体字</a:t>
             </a:r>
             <a:endParaRPr lang="en-US" sz="1050" dirty="0"/>
           </a:p>
@@ -5404,7 +5416,7 @@
                 <a:ea typeface="Microsoft YaHei" pitchFamily="34" charset="-122"/>
                 <a:cs typeface="Microsoft YaHei" pitchFamily="34" charset="-120"/>
               </a:rPr>
-              <a:t>重复/无动词/过短/过长检测</a:t>
+              <a:t>过滤掉重复的、无意义的识别结果</a:t>
             </a:r>
             <a:endParaRPr lang="en-US" sz="1050" dirty="0"/>
           </a:p>
@@ -5534,7 +5546,7 @@
                 <a:ea typeface="Microsoft YaHei" pitchFamily="34" charset="-122"/>
                 <a:cs typeface="Microsoft YaHei" pitchFamily="34" charset="-120"/>
               </a:rPr>
-              <a:t>5步预处理流水线 + 6层指令解析降级策略</a:t>
+              <a:t>怎么让音频更清晰？怎么让指令解析更准确？</a:t>
             </a:r>
             <a:endParaRPr lang="en-US" sz="1300" dirty="0"/>
           </a:p>
@@ -5693,7 +5705,7 @@
                 <a:ea typeface="Microsoft YaHei" pitchFamily="34" charset="-122"/>
                 <a:cs typeface="Microsoft YaHei" pitchFamily="34" charset="-120"/>
               </a:rPr>
-              <a:t>PCM采集</a:t>
+              <a:t>录音采集</a:t>
             </a:r>
             <a:endParaRPr lang="en-US" sz="1100" dirty="0"/>
           </a:p>
@@ -5732,7 +5744,7 @@
                 <a:ea typeface="Microsoft YaHei" pitchFamily="34" charset="-122"/>
                 <a:cs typeface="Microsoft YaHei" pitchFamily="34" charset="-120"/>
               </a:rPr>
-              <a:t>16kHz</a:t>
+              <a:t>麦克风录下</a:t>
             </a:r>
             <a:endParaRPr lang="en-US" sz="950" dirty="0"/>
           </a:p>
@@ -5749,7 +5761,7 @@
                 <a:ea typeface="Microsoft YaHei" pitchFamily="34" charset="-122"/>
                 <a:cs typeface="Microsoft YaHei" pitchFamily="34" charset="-120"/>
               </a:rPr>
-              <a:t>float32</a:t>
+              <a:t>原始音频数据</a:t>
             </a:r>
             <a:endParaRPr lang="en-US" sz="950" dirty="0"/>
           </a:p>
@@ -5851,7 +5863,7 @@
                 <a:ea typeface="Microsoft YaHei" pitchFamily="34" charset="-122"/>
                 <a:cs typeface="Microsoft YaHei" pitchFamily="34" charset="-120"/>
               </a:rPr>
-              <a:t>Silero VAD</a:t>
+              <a:t>神经网络 VAD</a:t>
             </a:r>
             <a:endParaRPr lang="en-US" sz="1100" dirty="0"/>
           </a:p>
@@ -5890,7 +5902,7 @@
                 <a:ea typeface="Microsoft YaHei" pitchFamily="34" charset="-122"/>
                 <a:cs typeface="Microsoft YaHei" pitchFamily="34" charset="-120"/>
               </a:rPr>
-              <a:t>576样本/帧</a:t>
+              <a:t>用 AI 找出人在</a:t>
             </a:r>
             <a:endParaRPr lang="en-US" sz="950" dirty="0"/>
           </a:p>
@@ -5907,7 +5919,7 @@
                 <a:ea typeface="Microsoft YaHei" pitchFamily="34" charset="-122"/>
                 <a:cs typeface="Microsoft YaHei" pitchFamily="34" charset="-120"/>
               </a:rPr>
-              <a:t>概率≥0.45</a:t>
+              <a:t>说话的片段</a:t>
             </a:r>
             <a:endParaRPr lang="en-US" sz="950" dirty="0"/>
           </a:p>
@@ -6009,7 +6021,7 @@
                 <a:ea typeface="Microsoft YaHei" pitchFamily="34" charset="-122"/>
                 <a:cs typeface="Microsoft YaHei" pitchFamily="34" charset="-120"/>
               </a:rPr>
-              <a:t>峰值归一化</a:t>
+              <a:t>音量归一化</a:t>
             </a:r>
             <a:endParaRPr lang="en-US" sz="1100" dirty="0"/>
           </a:p>
@@ -6048,7 +6060,7 @@
                 <a:ea typeface="Microsoft YaHei" pitchFamily="34" charset="-122"/>
                 <a:cs typeface="Microsoft YaHei" pitchFamily="34" charset="-120"/>
               </a:rPr>
-              <a:t>线性缩放</a:t>
+              <a:t>把声音调到</a:t>
             </a:r>
             <a:endParaRPr lang="en-US" sz="950" dirty="0"/>
           </a:p>
@@ -6065,7 +6077,7 @@
                 <a:ea typeface="Microsoft YaHei" pitchFamily="34" charset="-122"/>
                 <a:cs typeface="Microsoft YaHei" pitchFamily="34" charset="-120"/>
               </a:rPr>
-              <a:t>目标0.7</a:t>
+              <a:t>统一大小</a:t>
             </a:r>
             <a:endParaRPr lang="en-US" sz="950" dirty="0"/>
           </a:p>
@@ -6206,7 +6218,7 @@
                 <a:ea typeface="Microsoft YaHei" pitchFamily="34" charset="-122"/>
                 <a:cs typeface="Microsoft YaHei" pitchFamily="34" charset="-120"/>
               </a:rPr>
-              <a:t>RMS&lt;5%</a:t>
+              <a:t>没用的背景噪</a:t>
             </a:r>
             <a:endParaRPr lang="en-US" sz="950" dirty="0"/>
           </a:p>
@@ -6223,7 +6235,7 @@
                 <a:ea typeface="Microsoft YaHei" pitchFamily="34" charset="-122"/>
                 <a:cs typeface="Microsoft YaHei" pitchFamily="34" charset="-120"/>
               </a:rPr>
-              <a:t>帧静零</a:t>
+              <a:t>直接清零</a:t>
             </a:r>
             <a:endParaRPr lang="en-US" sz="950" dirty="0"/>
           </a:p>
@@ -6325,7 +6337,7 @@
                 <a:ea typeface="Microsoft YaHei" pitchFamily="34" charset="-122"/>
                 <a:cs typeface="Microsoft YaHei" pitchFamily="34" charset="-120"/>
               </a:rPr>
-              <a:t>预加重</a:t>
+              <a:t>高频增强</a:t>
             </a:r>
             <a:endParaRPr lang="en-US" sz="1100" dirty="0"/>
           </a:p>
@@ -6364,7 +6376,7 @@
                 <a:ea typeface="Microsoft YaHei" pitchFamily="34" charset="-122"/>
                 <a:cs typeface="Microsoft YaHei" pitchFamily="34" charset="-120"/>
               </a:rPr>
-              <a:t>系数0.97</a:t>
+              <a:t>强化辅音</a:t>
             </a:r>
             <a:endParaRPr lang="en-US" sz="950" dirty="0"/>
           </a:p>
@@ -6381,7 +6393,7 @@
                 <a:ea typeface="Microsoft YaHei" pitchFamily="34" charset="-122"/>
                 <a:cs typeface="Microsoft YaHei" pitchFamily="34" charset="-120"/>
               </a:rPr>
-              <a:t>增强辅音</a:t>
+              <a:t>让字含清楚</a:t>
             </a:r>
             <a:endParaRPr lang="en-US" sz="950" dirty="0"/>
           </a:p>
@@ -6430,7 +6442,7 @@
         <p:spPr>
           <a:xfrm>
             <a:off x="594360" y="3063240"/>
-            <a:ext cx="4572000" cy="274320"/>
+            <a:ext cx="7315200" cy="274320"/>
           </a:xfrm>
           <a:prstGeom prst="rect">
             <a:avLst/>
@@ -6454,7 +6466,7 @@
                 <a:ea typeface="Microsoft YaHei" pitchFamily="34" charset="-122"/>
                 <a:cs typeface="Microsoft YaHei" pitchFamily="34" charset="-120"/>
               </a:rPr>
-              <a:t>指令解析 · 6层降级策略</a:t>
+              <a:t>指令解析 · 6 层降级策略（就像连环话，一层不行就试下一层）</a:t>
             </a:r>
             <a:endParaRPr lang="en-US" sz="1400" dirty="0"/>
           </a:p>
@@ -6478,7 +6490,7 @@
           </a:prstGeom>
           <a:solidFill>
             <a:srgbClr val="1A73E8">
-              <a:alpha val="20000"/>
+              <a:alpha val="15000"/>
             </a:srgbClr>
           </a:solidFill>
           <a:ln/>
@@ -6517,7 +6529,7 @@
                 <a:ea typeface="Consolas" pitchFamily="34" charset="-122"/>
                 <a:cs typeface="Consolas" pitchFamily="34" charset="-120"/>
               </a:rPr>
-              <a:t>L1 Trie纠错</a:t>
+              <a:t>L1 拼音纠错</a:t>
             </a:r>
             <a:endParaRPr lang="en-US" sz="800" dirty="0"/>
           </a:p>
@@ -6556,7 +6568,7 @@
                 <a:ea typeface="Microsoft YaHei" pitchFamily="34" charset="-122"/>
                 <a:cs typeface="Microsoft YaHei" pitchFamily="34" charset="-120"/>
               </a:rPr>
-              <a:t>Trie纠错</a:t>
+              <a:t>拼音纠错</a:t>
             </a:r>
             <a:endParaRPr lang="en-US" sz="1000" dirty="0"/>
           </a:p>
@@ -6595,7 +6607,7 @@
                 <a:ea typeface="Microsoft YaHei" pitchFamily="34" charset="-122"/>
                 <a:cs typeface="Microsoft YaHei" pitchFamily="34" charset="-120"/>
               </a:rPr>
-              <a:t>前缀树前向最大匹配 + 拼音编辑距离兜底（阈值: ≤3字距1, ≥4字距2）</a:t>
+              <a:t>先帮 Whisper 纠正听错的字，比如“网易林”纠成“网易云”</a:t>
             </a:r>
             <a:endParaRPr lang="en-US" sz="900" dirty="0"/>
           </a:p>
@@ -6619,7 +6631,7 @@
           </a:prstGeom>
           <a:solidFill>
             <a:srgbClr val="1A73E8">
-              <a:alpha val="20000"/>
+              <a:alpha val="15000"/>
             </a:srgbClr>
           </a:solidFill>
           <a:ln/>
@@ -6736,7 +6748,7 @@
                 <a:ea typeface="Microsoft YaHei" pitchFamily="34" charset="-122"/>
                 <a:cs typeface="Microsoft YaHei" pitchFamily="34" charset="-120"/>
               </a:rPr>
-              <a:t>250+ 关键词→指令映射表，最长匹配优先</a:t>
+              <a:t>直接在 250+ 关键词里找，找到就执行</a:t>
             </a:r>
             <a:endParaRPr lang="en-US" sz="900" dirty="0"/>
           </a:p>
@@ -6760,7 +6772,7 @@
           </a:prstGeom>
           <a:solidFill>
             <a:srgbClr val="1A73E8">
-              <a:alpha val="20000"/>
+              <a:alpha val="15000"/>
             </a:srgbClr>
           </a:solidFill>
           <a:ln/>
@@ -6799,7 +6811,7 @@
                 <a:ea typeface="Consolas" pitchFamily="34" charset="-122"/>
                 <a:cs typeface="Consolas" pitchFamily="34" charset="-120"/>
               </a:rPr>
-              <a:t>L3 正则模式</a:t>
+              <a:t>L3 模式匹配</a:t>
             </a:r>
             <a:endParaRPr lang="en-US" sz="800" dirty="0"/>
           </a:p>
@@ -6838,7 +6850,7 @@
                 <a:ea typeface="Microsoft YaHei" pitchFamily="34" charset="-122"/>
                 <a:cs typeface="Microsoft YaHei" pitchFamily="34" charset="-120"/>
               </a:rPr>
-              <a:t>正则模式</a:t>
+              <a:t>模式匹配</a:t>
             </a:r>
             <a:endParaRPr lang="en-US" sz="1000" dirty="0"/>
           </a:p>
@@ -6877,7 +6889,7 @@
                 <a:ea typeface="Microsoft YaHei" pitchFamily="34" charset="-122"/>
                 <a:cs typeface="Microsoft YaHei" pitchFamily="34" charset="-120"/>
               </a:rPr>
-              <a:t>动词(打开/关闭/搜索)+应用名 正则提取</a:t>
+              <a:t>识别“打开 XXX”这种固定句式</a:t>
             </a:r>
             <a:endParaRPr lang="en-US" sz="900" dirty="0"/>
           </a:p>
@@ -6901,7 +6913,7 @@
           </a:prstGeom>
           <a:solidFill>
             <a:srgbClr val="1A73E8">
-              <a:alpha val="20000"/>
+              <a:alpha val="15000"/>
             </a:srgbClr>
           </a:solidFill>
           <a:ln/>
@@ -6940,7 +6952,7 @@
                 <a:ea typeface="Consolas" pitchFamily="34" charset="-122"/>
                 <a:cs typeface="Consolas" pitchFamily="34" charset="-120"/>
               </a:rPr>
-              <a:t>L4 滑动拼音</a:t>
+              <a:t>L4 拼音滑动</a:t>
             </a:r>
             <a:endParaRPr lang="en-US" sz="800" dirty="0"/>
           </a:p>
@@ -6979,7 +6991,7 @@
                 <a:ea typeface="Microsoft YaHei" pitchFamily="34" charset="-122"/>
                 <a:cs typeface="Microsoft YaHei" pitchFamily="34" charset="-120"/>
               </a:rPr>
-              <a:t>滑动拼音</a:t>
+              <a:t>拼音滑动</a:t>
             </a:r>
             <a:endParaRPr lang="en-US" sz="1000" dirty="0"/>
           </a:p>
@@ -7018,7 +7030,7 @@
                 <a:ea typeface="Microsoft YaHei" pitchFamily="34" charset="-122"/>
                 <a:cs typeface="Microsoft YaHei" pitchFamily="34" charset="-120"/>
               </a:rPr>
-              <a:t>拼音音节序列滑动窗口对齐，容许音节级误差</a:t>
+              <a:t>把听到的拼音和应用名拼音对比匹配</a:t>
             </a:r>
             <a:endParaRPr lang="en-US" sz="900" dirty="0"/>
           </a:p>
@@ -7042,7 +7054,7 @@
           </a:prstGeom>
           <a:solidFill>
             <a:srgbClr val="1A73E8">
-              <a:alpha val="20000"/>
+              <a:alpha val="15000"/>
             </a:srgbClr>
           </a:solidFill>
           <a:ln/>
@@ -7081,7 +7093,7 @@
                 <a:ea typeface="Consolas" pitchFamily="34" charset="-122"/>
                 <a:cs typeface="Consolas" pitchFamily="34" charset="-120"/>
               </a:rPr>
-              <a:t>L5 NLU语义</a:t>
+              <a:t>L5 语义理解</a:t>
             </a:r>
             <a:endParaRPr lang="en-US" sz="800" dirty="0"/>
           </a:p>
@@ -7120,7 +7132,7 @@
                 <a:ea typeface="Microsoft YaHei" pitchFamily="34" charset="-122"/>
                 <a:cs typeface="Microsoft YaHei" pitchFamily="34" charset="-120"/>
               </a:rPr>
-              <a:t>NLU语义</a:t>
+              <a:t>语义理解</a:t>
             </a:r>
             <a:endParaRPr lang="en-US" sz="1000" dirty="0"/>
           </a:p>
@@ -7159,7 +7171,7 @@
                 <a:ea typeface="Microsoft YaHei" pitchFamily="34" charset="-122"/>
                 <a:cs typeface="Microsoft YaHei" pitchFamily="34" charset="-120"/>
               </a:rPr>
-              <a:t>BERT-base-chinese 26类意图分类，置信度≥0.5</a:t>
+              <a:t>用 BERT 模型理解你的意图，即使表达不同</a:t>
             </a:r>
             <a:endParaRPr lang="en-US" sz="900" dirty="0"/>
           </a:p>
@@ -7183,7 +7195,7 @@
           </a:prstGeom>
           <a:solidFill>
             <a:srgbClr val="1A73E8">
-              <a:alpha val="20000"/>
+              <a:alpha val="15000"/>
             </a:srgbClr>
           </a:solidFill>
           <a:ln/>
@@ -7222,7 +7234,7 @@
                 <a:ea typeface="Consolas" pitchFamily="34" charset="-122"/>
                 <a:cs typeface="Consolas" pitchFamily="34" charset="-120"/>
               </a:rPr>
-              <a:t>L6 模糊兜底</a:t>
+              <a:t>L6 模糊兑底</a:t>
             </a:r>
             <a:endParaRPr lang="en-US" sz="800" dirty="0"/>
           </a:p>
@@ -7261,7 +7273,7 @@
                 <a:ea typeface="Microsoft YaHei" pitchFamily="34" charset="-122"/>
                 <a:cs typeface="Microsoft YaHei" pitchFamily="34" charset="-120"/>
               </a:rPr>
-              <a:t>模糊兜底</a:t>
+              <a:t>模糊兑底</a:t>
             </a:r>
             <a:endParaRPr lang="en-US" sz="1000" dirty="0"/>
           </a:p>
@@ -7300,7 +7312,7 @@
                 <a:ea typeface="Microsoft YaHei" pitchFamily="34" charset="-122"/>
                 <a:cs typeface="Microsoft YaHei" pitchFamily="34" charset="-120"/>
               </a:rPr>
-              <a:t>关键词模糊匹配 + 编辑距离 + 语义兜底</a:t>
+              <a:t>实在解析不出来，就用模糊匹配试一下</a:t>
             </a:r>
             <a:endParaRPr lang="en-US" sz="900" dirty="0"/>
           </a:p>
@@ -7430,7 +7442,7 @@
                 <a:ea typeface="Microsoft YaHei" pitchFamily="34" charset="-122"/>
                 <a:cs typeface="Microsoft YaHei" pitchFamily="34" charset="-120"/>
               </a:rPr>
-              <a:t>ECAPA-TDNN 声纹闭环 + PyQt5 赛博朋克界面</a:t>
+              <a:t>怎么知道“你是谁”？界面长什么样？</a:t>
             </a:r>
             <a:endParaRPr lang="en-US" sz="1300" dirty="0"/>
           </a:p>
@@ -7538,7 +7550,7 @@
         <p:spPr>
           <a:xfrm>
             <a:off x="594360" y="1600200"/>
-            <a:ext cx="1828800" cy="228600"/>
+            <a:ext cx="3657600" cy="228600"/>
           </a:xfrm>
           <a:prstGeom prst="rect">
             <a:avLst/>
@@ -7562,7 +7574,7 @@
                 <a:ea typeface="Microsoft YaHei" pitchFamily="34" charset="-122"/>
                 <a:cs typeface="Microsoft YaHei" pitchFamily="34" charset="-120"/>
               </a:rPr>
-              <a:t>注册流程</a:t>
+              <a:t>注册流程（告诉电脑你是谁）</a:t>
             </a:r>
             <a:endParaRPr lang="en-US" sz="1200" dirty="0"/>
           </a:p>
@@ -7601,7 +7613,7 @@
                 <a:ea typeface="Microsoft YaHei" pitchFamily="34" charset="-122"/>
                 <a:cs typeface="Microsoft YaHei" pitchFamily="34" charset="-120"/>
               </a:rPr>
-              <a:t>1. 用户输入用户名 → 检查是否已注册</a:t>
+              <a:t>1. 用户输入名字，比如“Halley”</a:t>
             </a:r>
             <a:endParaRPr lang="en-US" sz="1050" dirty="0"/>
           </a:p>
@@ -7640,7 +7652,7 @@
                 <a:ea typeface="Microsoft YaHei" pitchFamily="34" charset="-122"/>
                 <a:cs typeface="Microsoft YaHei" pitchFamily="34" charset="-120"/>
               </a:rPr>
-              <a:t>2. 动态采样器生成 3 段提示词（3-5s）</a:t>
+              <a:t>2. 系统给你 3 段提示词让你朗读</a:t>
             </a:r>
             <a:endParaRPr lang="en-US" sz="1050" dirty="0"/>
           </a:p>
@@ -7679,7 +7691,7 @@
                 <a:ea typeface="Microsoft YaHei" pitchFamily="34" charset="-122"/>
                 <a:cs typeface="Microsoft YaHei" pitchFamily="34" charset="-120"/>
               </a:rPr>
-              <a:t>3. 逐段录音 → Silero VAD 提取有效语音</a:t>
+              <a:t>3. 每读一段，系统录下你的声音</a:t>
             </a:r>
             <a:endParaRPr lang="en-US" sz="1050" dirty="0"/>
           </a:p>
@@ -7718,7 +7730,7 @@
                 <a:ea typeface="Microsoft YaHei" pitchFamily="34" charset="-122"/>
                 <a:cs typeface="Microsoft YaHei" pitchFamily="34" charset="-120"/>
               </a:rPr>
-              <a:t>4. ECAPA-TDNN 提取 192 维嵌入向量</a:t>
+              <a:t>4. 用 AI 模型提取声纹特征向量</a:t>
             </a:r>
             <a:endParaRPr lang="en-US" sz="1050" dirty="0"/>
           </a:p>
@@ -7757,7 +7769,7 @@
                 <a:ea typeface="Microsoft YaHei" pitchFamily="34" charset="-122"/>
                 <a:cs typeface="Microsoft YaHei" pitchFamily="34" charset="-120"/>
               </a:rPr>
-              <a:t>5. 3 段嵌入取平均 → 存入 speakers.json</a:t>
+              <a:t>5. 3 段取平均值，存入数据库</a:t>
             </a:r>
             <a:endParaRPr lang="en-US" sz="1050" dirty="0"/>
           </a:p>
@@ -7772,7 +7784,7 @@
         <p:spPr>
           <a:xfrm>
             <a:off x="594360" y="3566160"/>
-            <a:ext cx="1828800" cy="228600"/>
+            <a:ext cx="3657600" cy="228600"/>
           </a:xfrm>
           <a:prstGeom prst="rect">
             <a:avLst/>
@@ -7796,7 +7808,7 @@
                 <a:ea typeface="Microsoft YaHei" pitchFamily="34" charset="-122"/>
                 <a:cs typeface="Microsoft YaHei" pitchFamily="34" charset="-120"/>
               </a:rPr>
-              <a:t>验证流程</a:t>
+              <a:t>验证流程（确认是不是你）</a:t>
             </a:r>
             <a:endParaRPr lang="en-US" sz="1200" dirty="0"/>
           </a:p>
@@ -7835,24 +7847,7 @@
                 <a:ea typeface="Microsoft YaHei" pitchFamily="34" charset="-122"/>
                 <a:cs typeface="Microsoft YaHei" pitchFamily="34" charset="-120"/>
               </a:rPr>
-              <a:t>录音 3s → VAD 提取 → ECAPA-TDNN 嵌入 →</a:t>
-            </a:r>
-            <a:endParaRPr lang="en-US" sz="1050" dirty="0"/>
-          </a:p>
-          <a:p>
-            <a:pPr indent="0" marL="0">
-              <a:buNone/>
-            </a:pPr>
-            <a:r>
-              <a:rPr lang="en-US" sz="1050" dirty="0">
-                <a:solidFill>
-                  <a:srgbClr val="4A4A6A"/>
-                </a:solidFill>
-                <a:latin typeface="Microsoft YaHei" pitchFamily="34" charset="0"/>
-                <a:ea typeface="Microsoft YaHei" pitchFamily="34" charset="-122"/>
-                <a:cs typeface="Microsoft YaHei" pitchFamily="34" charset="-120"/>
-              </a:rPr>
-              <a:t>余弦相似度 ≥ 0.5 判定通过 → 后续指令绑定用户身份</a:t>
+              <a:t>录 3 秒声音 → 提取声纹 → 跟注册时存的对比 → 相似度≥0.5 就算验证通过</a:t>
             </a:r>
             <a:endParaRPr lang="en-US" sz="1050" dirty="0"/>
           </a:p>
@@ -8003,7 +7998,7 @@
                 <a:ea typeface="Microsoft YaHei" pitchFamily="34" charset="-122"/>
                 <a:cs typeface="Microsoft YaHei" pitchFamily="34" charset="-120"/>
               </a:rPr>
-              <a:t>▸ 无边框窗口 + 流体背景 + 毛玻璃卡片</a:t>
+              <a:t>▸ 无边框窗口 + 流体背景 + 毛玻璃效果</a:t>
             </a:r>
             <a:endParaRPr lang="en-US" sz="1050" dirty="0"/>
           </a:p>
@@ -8042,7 +8037,7 @@
                 <a:ea typeface="Microsoft YaHei" pitchFamily="34" charset="-122"/>
                 <a:cs typeface="Microsoft YaHei" pitchFamily="34" charset="-120"/>
               </a:rPr>
-              <a:t>▸ 脉冲呼吸球声纹动画效果</a:t>
+              <a:t>▸ 声纹验证/注册/跳过三个入口</a:t>
             </a:r>
             <a:endParaRPr lang="en-US" sz="1050" dirty="0"/>
           </a:p>
@@ -8081,7 +8076,7 @@
                 <a:ea typeface="Microsoft YaHei" pitchFamily="34" charset="-122"/>
                 <a:cs typeface="Microsoft YaHei" pitchFamily="34" charset="-120"/>
               </a:rPr>
-              <a:t>▸ 声纹验证/注册/跳过 三入口</a:t>
+              <a:t>▸ 脉冲呼吸球动画效果</a:t>
             </a:r>
             <a:endParaRPr lang="en-US" sz="1050" dirty="0"/>
           </a:p>
@@ -8159,7 +8154,7 @@
                 <a:ea typeface="Microsoft YaHei" pitchFamily="34" charset="-122"/>
                 <a:cs typeface="Microsoft YaHei" pitchFamily="34" charset="-120"/>
               </a:rPr>
-              <a:t>▸ 三栏布局：控制面板 + 日志 + 信息</a:t>
+              <a:t>▸ 三栏布局：控制面板 + 日志 + 系统信息</a:t>
             </a:r>
             <a:endParaRPr lang="en-US" sz="1050" dirty="0"/>
           </a:p>
@@ -8198,7 +8193,7 @@
                 <a:ea typeface="Microsoft YaHei" pitchFamily="34" charset="-122"/>
                 <a:cs typeface="Microsoft YaHei" pitchFamily="34" charset="-120"/>
               </a:rPr>
-              <a:t>▸ 实时音频波形可视化</a:t>
+              <a:t>▸ 实时音频波形可视化，看得见声音</a:t>
             </a:r>
             <a:endParaRPr lang="en-US" sz="1050" dirty="0"/>
           </a:p>
@@ -8237,7 +8232,7 @@
                 <a:ea typeface="Microsoft YaHei" pitchFamily="34" charset="-122"/>
                 <a:cs typeface="Microsoft YaHei" pitchFamily="34" charset="-120"/>
               </a:rPr>
-              <a:t>▸ 快捷指令按钮 + 身份管理板块</a:t>
+              <a:t>▸ 状态灯告诉你系统在干什么</a:t>
             </a:r>
             <a:endParaRPr lang="en-US" sz="1050" dirty="0"/>
           </a:p>
@@ -8276,7 +8271,7 @@
                 <a:ea typeface="Microsoft YaHei" pitchFamily="34" charset="-122"/>
                 <a:cs typeface="Microsoft YaHei" pitchFamily="34" charset="-120"/>
               </a:rPr>
-              <a:t>▸ 状态指示灯 (idle/listening/processing)</a:t>
+              <a:t>▸ 快捷按钮 + 身份管理板块</a:t>
             </a:r>
             <a:endParaRPr lang="en-US" sz="1050" dirty="0"/>
           </a:p>
@@ -8406,7 +8401,7 @@
                 <a:ea typeface="Microsoft YaHei" pitchFamily="34" charset="-122"/>
                 <a:cs typeface="Microsoft YaHei" pitchFamily="34" charset="-120"/>
               </a:rPr>
-              <a:t>从本地助手到系统级智能语音平台</a:t>
+              <a:t>还能做得更好！</a:t>
             </a:r>
             <a:endParaRPr lang="en-US" sz="1300" dirty="0"/>
           </a:p>
@@ -8621,41 +8616,7 @@
                 <a:ea typeface="Microsoft YaHei" pitchFamily="34" charset="-122"/>
                 <a:cs typeface="Microsoft YaHei" pitchFamily="34" charset="-120"/>
               </a:rPr>
-              <a:t>最小化到系统托盘，全局热键唤醒</a:t>
-            </a:r>
-            <a:endParaRPr lang="en-US" sz="1100" dirty="0"/>
-          </a:p>
-          <a:p>
-            <a:pPr indent="0" marL="0">
-              <a:buNone/>
-            </a:pPr>
-            <a:r>
-              <a:rPr lang="en-US" sz="1100" dirty="0">
-                <a:solidFill>
-                  <a:srgbClr val="4A4A6A"/>
-                </a:solidFill>
-                <a:latin typeface="Microsoft YaHei" pitchFamily="34" charset="0"/>
-                <a:ea typeface="Microsoft YaHei" pitchFamily="34" charset="-122"/>
-                <a:cs typeface="Microsoft YaHei" pitchFamily="34" charset="-120"/>
-              </a:rPr>
-              <a:t>后台持续监听语音，无需手动点击</a:t>
-            </a:r>
-            <a:endParaRPr lang="en-US" sz="1100" dirty="0"/>
-          </a:p>
-          <a:p>
-            <a:pPr indent="0" marL="0">
-              <a:buNone/>
-            </a:pPr>
-            <a:r>
-              <a:rPr lang="en-US" sz="1100" dirty="0">
-                <a:solidFill>
-                  <a:srgbClr val="4A4A6A"/>
-                </a:solidFill>
-                <a:latin typeface="Microsoft YaHei" pitchFamily="34" charset="0"/>
-                <a:ea typeface="Microsoft YaHei" pitchFamily="34" charset="-122"/>
-                <a:cs typeface="Microsoft YaHei" pitchFamily="34" charset="-120"/>
-              </a:rPr>
-              <a:t>支持 "你好助手" 唤醒词检测</a:t>
+              <a:t>像微信一样挂在后台，说一句“你好助手”就能唤醒。不用手动点按钮，随时随地语音控制。</a:t>
             </a:r>
             <a:endParaRPr lang="en-US" sz="1100" dirty="0"/>
           </a:p>
@@ -8811,7 +8772,7 @@
                 <a:ea typeface="Microsoft YaHei" pitchFamily="34" charset="-122"/>
                 <a:cs typeface="Microsoft YaHei" pitchFamily="34" charset="-120"/>
               </a:rPr>
-              <a:t>应用内功能控制</a:t>
+              <a:t>控制其他应用内部功能</a:t>
             </a:r>
             <a:endParaRPr lang="en-US" sz="1400" dirty="0"/>
           </a:p>
@@ -8850,41 +8811,7 @@
                 <a:ea typeface="Microsoft YaHei" pitchFamily="34" charset="-122"/>
                 <a:cs typeface="Microsoft YaHei" pitchFamily="34" charset="-120"/>
               </a:rPr>
-              <a:t>语音控制第三方应用内部功能</a:t>
-            </a:r>
-            <a:endParaRPr lang="en-US" sz="1100" dirty="0"/>
-          </a:p>
-          <a:p>
-            <a:pPr indent="0" marL="0">
-              <a:buNone/>
-            </a:pPr>
-            <a:r>
-              <a:rPr lang="en-US" sz="1100" dirty="0">
-                <a:solidFill>
-                  <a:srgbClr val="4A4A6A"/>
-                </a:solidFill>
-                <a:latin typeface="Microsoft YaHei" pitchFamily="34" charset="0"/>
-                <a:ea typeface="Microsoft YaHei" pitchFamily="34" charset="-122"/>
-                <a:cs typeface="Microsoft YaHei" pitchFamily="34" charset="-120"/>
-              </a:rPr>
-              <a:t>如："微信发送消息给张三" "PPT翻到下一页"</a:t>
-            </a:r>
-            <a:endParaRPr lang="en-US" sz="1100" dirty="0"/>
-          </a:p>
-          <a:p>
-            <a:pPr indent="0" marL="0">
-              <a:buNone/>
-            </a:pPr>
-            <a:r>
-              <a:rPr lang="en-US" sz="1100" dirty="0">
-                <a:solidFill>
-                  <a:srgbClr val="4A4A6A"/>
-                </a:solidFill>
-                <a:latin typeface="Microsoft YaHei" pitchFamily="34" charset="0"/>
-                <a:ea typeface="Microsoft YaHei" pitchFamily="34" charset="-122"/>
-                <a:cs typeface="Microsoft YaHei" pitchFamily="34" charset="-120"/>
-              </a:rPr>
-              <a:t>通过 UI Automation / Accessibility API 实现</a:t>
+              <a:t>不只是打开关闭，还能控制应用里面的功能。比如“微信发消息给张三”“PPT翻到下一页”。</a:t>
             </a:r>
             <a:endParaRPr lang="en-US" sz="1100" dirty="0"/>
           </a:p>
@@ -9079,41 +9006,7 @@
                 <a:ea typeface="Microsoft YaHei" pitchFamily="34" charset="-122"/>
                 <a:cs typeface="Microsoft YaHei" pitchFamily="34" charset="-120"/>
               </a:rPr>
-              <a:t>支持多轮对话上下文记忆</a:t>
-            </a:r>
-            <a:endParaRPr lang="en-US" sz="1100" dirty="0"/>
-          </a:p>
-          <a:p>
-            <a:pPr indent="0" marL="0">
-              <a:buNone/>
-            </a:pPr>
-            <a:r>
-              <a:rPr lang="en-US" sz="1100" dirty="0">
-                <a:solidFill>
-                  <a:srgbClr val="4A4A6A"/>
-                </a:solidFill>
-                <a:latin typeface="Microsoft YaHei" pitchFamily="34" charset="0"/>
-                <a:ea typeface="Microsoft YaHei" pitchFamily="34" charset="-122"/>
-                <a:cs typeface="Microsoft YaHei" pitchFamily="34" charset="-120"/>
-              </a:rPr>
-              <a:t>"打开微信" → "给张三发消息" → "发送"</a:t>
-            </a:r>
-            <a:endParaRPr lang="en-US" sz="1100" dirty="0"/>
-          </a:p>
-          <a:p>
-            <a:pPr indent="0" marL="0">
-              <a:buNone/>
-            </a:pPr>
-            <a:r>
-              <a:rPr lang="en-US" sz="1100" dirty="0">
-                <a:solidFill>
-                  <a:srgbClr val="4A4A6A"/>
-                </a:solidFill>
-                <a:latin typeface="Microsoft YaHei" pitchFamily="34" charset="0"/>
-                <a:ea typeface="Microsoft YaHei" pitchFamily="34" charset="-122"/>
-                <a:cs typeface="Microsoft YaHei" pitchFamily="34" charset="-120"/>
-              </a:rPr>
-              <a:t>基于 LLM 的意图消解与指代理解</a:t>
+              <a:t>能记住你之前说的话。比如“打开微信”→“给张三发消息”→“发送”，像跟人对话一样。</a:t>
             </a:r>
             <a:endParaRPr lang="en-US" sz="1100" dirty="0"/>
           </a:p>
@@ -9308,41 +9201,7 @@
                 <a:ea typeface="Microsoft YaHei" pitchFamily="34" charset="-122"/>
                 <a:cs typeface="Microsoft YaHei" pitchFamily="34" charset="-120"/>
               </a:rPr>
-              <a:t>支持中英混合语音输入</a:t>
-            </a:r>
-            <a:endParaRPr lang="en-US" sz="1100" dirty="0"/>
-          </a:p>
-          <a:p>
-            <a:pPr indent="0" marL="0">
-              <a:buNone/>
-            </a:pPr>
-            <a:r>
-              <a:rPr lang="en-US" sz="1100" dirty="0">
-                <a:solidFill>
-                  <a:srgbClr val="4A4A6A"/>
-                </a:solidFill>
-                <a:latin typeface="Microsoft YaHei" pitchFamily="34" charset="0"/>
-                <a:ea typeface="Microsoft YaHei" pitchFamily="34" charset="-122"/>
-                <a:cs typeface="Microsoft YaHei" pitchFamily="34" charset="-120"/>
-              </a:rPr>
-              <a:t>流式 ASR 实现边说边识别</a:t>
-            </a:r>
-            <a:endParaRPr lang="en-US" sz="1100" dirty="0"/>
-          </a:p>
-          <a:p>
-            <a:pPr indent="0" marL="0">
-              <a:buNone/>
-            </a:pPr>
-            <a:r>
-              <a:rPr lang="en-US" sz="1100" dirty="0">
-                <a:solidFill>
-                  <a:srgbClr val="4A4A6A"/>
-                </a:solidFill>
-                <a:latin typeface="Microsoft YaHei" pitchFamily="34" charset="0"/>
-                <a:ea typeface="Microsoft YaHei" pitchFamily="34" charset="-122"/>
-                <a:cs typeface="Microsoft YaHei" pitchFamily="34" charset="-120"/>
-              </a:rPr>
-              <a:t>延迟降至 200ms 以内</a:t>
+              <a:t>支持中英混合输入，边说边识别，响应延迟降到 200ms 以内。</a:t>
             </a:r>
             <a:endParaRPr lang="en-US" sz="1100" dirty="0"/>
           </a:p>
@@ -9609,7 +9468,7 @@
                 <a:ea typeface="Microsoft YaHei" pitchFamily="34" charset="-122"/>
                 <a:cs typeface="Microsoft YaHei" pitchFamily="34" charset="-120"/>
               </a:rPr>
-              <a:t>Faster-Whisper 双引擎</a:t>
+              <a:t>双引擎架构</a:t>
             </a:r>
             <a:endParaRPr lang="en-US" sz="1100" dirty="0"/>
           </a:p>
@@ -9626,7 +9485,7 @@
                 <a:ea typeface="Microsoft YaHei" pitchFamily="34" charset="-122"/>
                 <a:cs typeface="Microsoft YaHei" pitchFamily="34" charset="-120"/>
               </a:rPr>
-              <a:t>beam 束搜索 + 热词引导</a:t>
+              <a:t>束搜索 + 热词引导</a:t>
             </a:r>
             <a:endParaRPr lang="en-US" sz="1100" dirty="0"/>
           </a:p>
@@ -9643,7 +9502,7 @@
                 <a:ea typeface="Microsoft YaHei" pitchFamily="34" charset="-122"/>
                 <a:cs typeface="Microsoft YaHei" pitchFamily="34" charset="-120"/>
               </a:rPr>
-              <a:t>拼音 Trie 纠错兜底</a:t>
+              <a:t>拼音纠错兑底</a:t>
             </a:r>
             <a:endParaRPr lang="en-US" sz="1100" dirty="0"/>
           </a:p>
@@ -9775,7 +9634,7 @@
                 <a:ea typeface="Microsoft YaHei" pitchFamily="34" charset="-122"/>
                 <a:cs typeface="Microsoft YaHei" pitchFamily="34" charset="-120"/>
               </a:rPr>
-              <a:t>ECAPA-TDNN 深度学习</a:t>
+              <a:t>AI 声纹模型</a:t>
             </a:r>
             <a:endParaRPr lang="en-US" sz="1100" dirty="0"/>
           </a:p>
@@ -9792,7 +9651,7 @@
                 <a:ea typeface="Microsoft YaHei" pitchFamily="34" charset="-122"/>
                 <a:cs typeface="Microsoft YaHei" pitchFamily="34" charset="-120"/>
               </a:rPr>
-              <a:t>192维嵌入 + 余弦相似度</a:t>
+              <a:t>192维特征向量</a:t>
             </a:r>
             <a:endParaRPr lang="en-US" sz="1100" dirty="0"/>
           </a:p>
@@ -9941,7 +9800,7 @@
                 <a:ea typeface="Microsoft YaHei" pitchFamily="34" charset="-122"/>
                 <a:cs typeface="Microsoft YaHei" pitchFamily="34" charset="-120"/>
               </a:rPr>
-              <a:t>6层指令解析策略</a:t>
+              <a:t>6 层解析策略</a:t>
             </a:r>
             <a:endParaRPr lang="en-US" sz="1100" dirty="0"/>
           </a:p>
@@ -10068,7 +9927,7 @@
                 <a:ea typeface="Microsoft YaHei" pitchFamily="34" charset="-122"/>
                 <a:cs typeface="Microsoft YaHei" pitchFamily="34" charset="-120"/>
               </a:rPr>
-              <a:t>现代UI</a:t>
+              <a:t>现代 UI</a:t>
             </a:r>
             <a:endParaRPr lang="en-US" sz="1400" dirty="0"/>
           </a:p>
@@ -10107,7 +9966,7 @@
                 <a:ea typeface="Microsoft YaHei" pitchFamily="34" charset="-122"/>
                 <a:cs typeface="Microsoft YaHei" pitchFamily="34" charset="-120"/>
               </a:rPr>
-              <a:t>PyQt5 无边框窗口</a:t>
+              <a:t>无边框窗口</a:t>
             </a:r>
             <a:endParaRPr lang="en-US" sz="1100" dirty="0"/>
           </a:p>
@@ -10141,7 +10000,7 @@
                 <a:ea typeface="Microsoft YaHei" pitchFamily="34" charset="-122"/>
                 <a:cs typeface="Microsoft YaHei" pitchFamily="34" charset="-120"/>
               </a:rPr>
-              <a:t>脉冲呼吸球动画</a:t>
+              <a:t>动态效果</a:t>
             </a:r>
             <a:endParaRPr lang="en-US" sz="1100" dirty="0"/>
           </a:p>
